--- a/scripts/video/deck/EVAGAMEPROCE-video.pptx
+++ b/scripts/video/deck/EVAGAMEPROCE-video.pptx
@@ -1906,7 +1906,7 @@
 Un juego diseñado para poner a prueba tu cerebro orgánico…
 EN PANTALLA: Tu cerebro orgánico, a prueba.
 IMAGEN: capturas/vertical/10-oral.png
-CLIP: scripts/video/clips/mision.mp4
+CLIP: scripts/video/clips/oral.mp4
 MONTAJE:
 La interrogación oral: tres examinadores atacando en cadena. Aquí entra movimiento de verdad — usar el clip, no la captura fija. Los puntos suspensivos son una pausa real: la frase no termina hasta la escena 7.</a:t>
             </a:r>
@@ -2001,7 +2001,7 @@
 Y descubrir cuánto sabes realmente.
 EN PANTALLA: ¿Cuánto sabes realmente?
 IMAGEN: capturas/vertical/04-mision.png
-CLIP: scripts/video/clips/examen.mp4
+CLIP: scripts/video/clips/mision.mp4
 MONTAJE:
 Pregunta con las alternativas todavía neutras. El espectador elige en su cabeza. Dejarla en pantalla lo suficiente para que alcance a leerla: si no la lee, la escena 8 no funciona.</a:t>
             </a:r>
@@ -12232,7 +12232,7 @@
                 <a:ea typeface="Courier New" pitchFamily="34" charset="-122"/>
                 <a:cs typeface="Courier New" pitchFamily="34" charset="-120"/>
               </a:rPr>
-              <a:t>EN PANTALLA: CLIP  ·  clips/mision.mp4</a:t>
+              <a:t>EN PANTALLA: CLIP  ·  clips/oral.mp4</a:t>
             </a:r>
             <a:endParaRPr lang="en-US" sz="1000" dirty="0"/>
           </a:p>
@@ -12720,7 +12720,7 @@
                 <a:ea typeface="Courier New" pitchFamily="34" charset="-122"/>
                 <a:cs typeface="Courier New" pitchFamily="34" charset="-120"/>
               </a:rPr>
-              <a:t>EN PANTALLA: CLIP  ·  clips/examen.mp4</a:t>
+              <a:t>EN PANTALLA: CLIP  ·  clips/mision.mp4</a:t>
             </a:r>
             <a:endParaRPr lang="en-US" sz="1000" dirty="0"/>
           </a:p>
